--- a/Slides/Steam/2026-13-05_ORIENTATIE_PROGRAMMA.pptx
+++ b/Slides/Steam/2026-13-05_ORIENTATIE_PROGRAMMA.pptx
@@ -5,16 +5,15 @@
     <p:sldMasterId id="2147483734" r:id="rId4"/>
   </p:sldMasterIdLst>
   <p:notesMasterIdLst>
-    <p:notesMasterId r:id="rId9"/>
+    <p:notesMasterId r:id="rId8"/>
   </p:notesMasterIdLst>
   <p:handoutMasterIdLst>
-    <p:handoutMasterId r:id="rId10"/>
+    <p:handoutMasterId r:id="rId9"/>
   </p:handoutMasterIdLst>
   <p:sldIdLst>
     <p:sldId id="311" r:id="rId5"/>
     <p:sldId id="262" r:id="rId6"/>
-    <p:sldId id="312" r:id="rId7"/>
-    <p:sldId id="313" r:id="rId8"/>
+    <p:sldId id="313" r:id="rId7"/>
   </p:sldIdLst>
   <p:sldSz cx="12192000" cy="6858000"/>
   <p:notesSz cx="6794500" cy="9982200"/>
@@ -150,12 +149,8 @@
           <p14:sldIdLst>
             <p14:sldId id="311"/>
             <p14:sldId id="262"/>
-            <p14:sldId id="312"/>
             <p14:sldId id="313"/>
           </p14:sldIdLst>
-        </p14:section>
-        <p14:section name="Merge sort" id="{C0717928-DED3-4FFE-A860-E07D61A5B6AF}">
-          <p14:sldIdLst/>
         </p14:section>
       </p14:sectionLst>
     </p:ext>
@@ -343,14 +338,14 @@
           <a:effectLst/>
           <a:extLst>
             <a:ext uri="{909E8E84-426E-40dd-AFC4-6F175D3DCCD1}">
-              <a14:hiddenFill xmlns="" xmlns:a14="http://schemas.microsoft.com/office/drawing/2010/main">
+              <a14:hiddenFill xmlns:a14="http://schemas.microsoft.com/office/drawing/2010/main" xmlns="">
                 <a:solidFill>
                   <a:schemeClr val="accent1"/>
                 </a:solidFill>
               </a14:hiddenFill>
             </a:ext>
             <a:ext uri="{91240B29-F687-4f45-9708-019B960494DF}">
-              <a14:hiddenLine xmlns="" xmlns:a14="http://schemas.microsoft.com/office/drawing/2010/main" w="9525">
+              <a14:hiddenLine xmlns:a14="http://schemas.microsoft.com/office/drawing/2010/main" xmlns="" w="9525">
                 <a:solidFill>
                   <a:schemeClr val="tx1"/>
                 </a:solidFill>
@@ -360,7 +355,7 @@
               </a14:hiddenLine>
             </a:ext>
             <a:ext uri="{AF507438-7753-43e0-B8FC-AC1667EBCBE1}">
-              <a14:hiddenEffects xmlns="" xmlns:a14="http://schemas.microsoft.com/office/drawing/2010/main">
+              <a14:hiddenEffects xmlns:a14="http://schemas.microsoft.com/office/drawing/2010/main" xmlns="">
                 <a:effectLst>
                   <a:outerShdw blurRad="63500" dist="38099" dir="2700000" algn="ctr" rotWithShape="0">
                     <a:schemeClr val="bg2">
@@ -371,7 +366,7 @@
               </a14:hiddenEffects>
             </a:ext>
             <a:ext uri="{FAA26D3D-D897-4be2-8F04-BA451C77F1D7}">
-              <ma14:placeholderFlag xmlns="" xmlns:ma14="http://schemas.microsoft.com/office/mac/drawingml/2011/main" val="1"/>
+              <ma14:placeholderFlag xmlns:ma14="http://schemas.microsoft.com/office/mac/drawingml/2011/main" xmlns="" val="1"/>
             </a:ext>
           </a:extLst>
         </p:spPr>
@@ -425,14 +420,14 @@
           <a:effectLst/>
           <a:extLst>
             <a:ext uri="{909E8E84-426E-40dd-AFC4-6F175D3DCCD1}">
-              <a14:hiddenFill xmlns="" xmlns:a14="http://schemas.microsoft.com/office/drawing/2010/main">
+              <a14:hiddenFill xmlns:a14="http://schemas.microsoft.com/office/drawing/2010/main" xmlns="">
                 <a:solidFill>
                   <a:schemeClr val="accent1"/>
                 </a:solidFill>
               </a14:hiddenFill>
             </a:ext>
             <a:ext uri="{91240B29-F687-4f45-9708-019B960494DF}">
-              <a14:hiddenLine xmlns="" xmlns:a14="http://schemas.microsoft.com/office/drawing/2010/main" w="9525">
+              <a14:hiddenLine xmlns:a14="http://schemas.microsoft.com/office/drawing/2010/main" xmlns="" w="9525">
                 <a:solidFill>
                   <a:schemeClr val="tx1"/>
                 </a:solidFill>
@@ -442,7 +437,7 @@
               </a14:hiddenLine>
             </a:ext>
             <a:ext uri="{AF507438-7753-43e0-B8FC-AC1667EBCBE1}">
-              <a14:hiddenEffects xmlns="" xmlns:a14="http://schemas.microsoft.com/office/drawing/2010/main">
+              <a14:hiddenEffects xmlns:a14="http://schemas.microsoft.com/office/drawing/2010/main" xmlns="">
                 <a:effectLst>
                   <a:outerShdw blurRad="63500" dist="38099" dir="2700000" algn="ctr" rotWithShape="0">
                     <a:schemeClr val="bg2">
@@ -453,7 +448,7 @@
               </a14:hiddenEffects>
             </a:ext>
             <a:ext uri="{FAA26D3D-D897-4be2-8F04-BA451C77F1D7}">
-              <ma14:placeholderFlag xmlns="" xmlns:ma14="http://schemas.microsoft.com/office/mac/drawingml/2011/main" val="1"/>
+              <ma14:placeholderFlag xmlns:ma14="http://schemas.microsoft.com/office/mac/drawingml/2011/main" xmlns="" val="1"/>
             </a:ext>
           </a:extLst>
         </p:spPr>
@@ -471,7 +466,7 @@
           <a:p>
             <a:fld id="{0B12D154-6756-477F-ACF6-75A5A1CA1461}" type="datetime1">
               <a:rPr lang="nl-NL" altLang="nl-NL" smtClean="0"/>
-              <a:t>4-5-2026</a:t>
+              <a:t>12-5-2026</a:t>
             </a:fld>
             <a:endParaRPr lang="en-US" altLang="nl-NL"/>
           </a:p>
@@ -502,14 +497,14 @@
           <a:effectLst/>
           <a:extLst>
             <a:ext uri="{909E8E84-426E-40dd-AFC4-6F175D3DCCD1}">
-              <a14:hiddenFill xmlns="" xmlns:a14="http://schemas.microsoft.com/office/drawing/2010/main">
+              <a14:hiddenFill xmlns:a14="http://schemas.microsoft.com/office/drawing/2010/main" xmlns="">
                 <a:solidFill>
                   <a:schemeClr val="accent1"/>
                 </a:solidFill>
               </a14:hiddenFill>
             </a:ext>
             <a:ext uri="{91240B29-F687-4f45-9708-019B960494DF}">
-              <a14:hiddenLine xmlns="" xmlns:a14="http://schemas.microsoft.com/office/drawing/2010/main" w="9525">
+              <a14:hiddenLine xmlns:a14="http://schemas.microsoft.com/office/drawing/2010/main" xmlns="" w="9525">
                 <a:solidFill>
                   <a:schemeClr val="tx1"/>
                 </a:solidFill>
@@ -519,7 +514,7 @@
               </a14:hiddenLine>
             </a:ext>
             <a:ext uri="{AF507438-7753-43e0-B8FC-AC1667EBCBE1}">
-              <a14:hiddenEffects xmlns="" xmlns:a14="http://schemas.microsoft.com/office/drawing/2010/main">
+              <a14:hiddenEffects xmlns:a14="http://schemas.microsoft.com/office/drawing/2010/main" xmlns="">
                 <a:effectLst>
                   <a:outerShdw blurRad="63500" dist="38099" dir="2700000" algn="ctr" rotWithShape="0">
                     <a:schemeClr val="bg2">
@@ -530,7 +525,7 @@
               </a14:hiddenEffects>
             </a:ext>
             <a:ext uri="{FAA26D3D-D897-4be2-8F04-BA451C77F1D7}">
-              <ma14:placeholderFlag xmlns="" xmlns:ma14="http://schemas.microsoft.com/office/mac/drawingml/2011/main" val="1"/>
+              <ma14:placeholderFlag xmlns:ma14="http://schemas.microsoft.com/office/mac/drawingml/2011/main" xmlns="" val="1"/>
             </a:ext>
           </a:extLst>
         </p:spPr>
@@ -584,14 +579,14 @@
           <a:effectLst/>
           <a:extLst>
             <a:ext uri="{909E8E84-426E-40dd-AFC4-6F175D3DCCD1}">
-              <a14:hiddenFill xmlns="" xmlns:a14="http://schemas.microsoft.com/office/drawing/2010/main">
+              <a14:hiddenFill xmlns:a14="http://schemas.microsoft.com/office/drawing/2010/main" xmlns="">
                 <a:solidFill>
                   <a:schemeClr val="accent1"/>
                 </a:solidFill>
               </a14:hiddenFill>
             </a:ext>
             <a:ext uri="{91240B29-F687-4f45-9708-019B960494DF}">
-              <a14:hiddenLine xmlns="" xmlns:a14="http://schemas.microsoft.com/office/drawing/2010/main" w="9525">
+              <a14:hiddenLine xmlns:a14="http://schemas.microsoft.com/office/drawing/2010/main" xmlns="" w="9525">
                 <a:solidFill>
                   <a:schemeClr val="tx1"/>
                 </a:solidFill>
@@ -601,7 +596,7 @@
               </a14:hiddenLine>
             </a:ext>
             <a:ext uri="{AF507438-7753-43e0-B8FC-AC1667EBCBE1}">
-              <a14:hiddenEffects xmlns="" xmlns:a14="http://schemas.microsoft.com/office/drawing/2010/main">
+              <a14:hiddenEffects xmlns:a14="http://schemas.microsoft.com/office/drawing/2010/main" xmlns="">
                 <a:effectLst>
                   <a:outerShdw blurRad="63500" dist="38099" dir="2700000" algn="ctr" rotWithShape="0">
                     <a:schemeClr val="bg2">
@@ -612,7 +607,7 @@
               </a14:hiddenEffects>
             </a:ext>
             <a:ext uri="{FAA26D3D-D897-4be2-8F04-BA451C77F1D7}">
-              <ma14:placeholderFlag xmlns="" xmlns:ma14="http://schemas.microsoft.com/office/mac/drawingml/2011/main" val="1"/>
+              <ma14:placeholderFlag xmlns:ma14="http://schemas.microsoft.com/office/mac/drawingml/2011/main" xmlns="" val="1"/>
             </a:ext>
           </a:extLst>
         </p:spPr>
@@ -631,7 +626,7 @@
             <a:fld id="{80582700-5991-49A4-A0D5-6241D3A3416A}" type="slidenum">
               <a:rPr lang="en-US" altLang="nl-NL"/>
               <a:pPr/>
-              <a:t>‹#›</a:t>
+              <a:t>‹nr.›</a:t>
             </a:fld>
             <a:endParaRPr lang="en-US" altLang="nl-NL"/>
           </a:p>
@@ -699,14 +694,14 @@
           <a:effectLst/>
           <a:extLst>
             <a:ext uri="{909E8E84-426E-40dd-AFC4-6F175D3DCCD1}">
-              <a14:hiddenFill xmlns="" xmlns:a14="http://schemas.microsoft.com/office/drawing/2010/main">
+              <a14:hiddenFill xmlns:a14="http://schemas.microsoft.com/office/drawing/2010/main" xmlns="">
                 <a:solidFill>
                   <a:schemeClr val="accent1"/>
                 </a:solidFill>
               </a14:hiddenFill>
             </a:ext>
             <a:ext uri="{91240B29-F687-4f45-9708-019B960494DF}">
-              <a14:hiddenLine xmlns="" xmlns:a14="http://schemas.microsoft.com/office/drawing/2010/main" w="9525">
+              <a14:hiddenLine xmlns:a14="http://schemas.microsoft.com/office/drawing/2010/main" xmlns="" w="9525">
                 <a:solidFill>
                   <a:schemeClr val="tx1"/>
                 </a:solidFill>
@@ -716,7 +711,7 @@
               </a14:hiddenLine>
             </a:ext>
             <a:ext uri="{AF507438-7753-43e0-B8FC-AC1667EBCBE1}">
-              <a14:hiddenEffects xmlns="" xmlns:a14="http://schemas.microsoft.com/office/drawing/2010/main">
+              <a14:hiddenEffects xmlns:a14="http://schemas.microsoft.com/office/drawing/2010/main" xmlns="">
                 <a:effectLst>
                   <a:outerShdw blurRad="63500" dist="38099" dir="2700000" algn="ctr" rotWithShape="0">
                     <a:schemeClr val="bg2">
@@ -727,7 +722,7 @@
               </a14:hiddenEffects>
             </a:ext>
             <a:ext uri="{FAA26D3D-D897-4be2-8F04-BA451C77F1D7}">
-              <ma14:placeholderFlag xmlns="" xmlns:ma14="http://schemas.microsoft.com/office/mac/drawingml/2011/main" val="1"/>
+              <ma14:placeholderFlag xmlns:ma14="http://schemas.microsoft.com/office/mac/drawingml/2011/main" xmlns="" val="1"/>
             </a:ext>
           </a:extLst>
         </p:spPr>
@@ -781,14 +776,14 @@
           <a:effectLst/>
           <a:extLst>
             <a:ext uri="{909E8E84-426E-40dd-AFC4-6F175D3DCCD1}">
-              <a14:hiddenFill xmlns="" xmlns:a14="http://schemas.microsoft.com/office/drawing/2010/main">
+              <a14:hiddenFill xmlns:a14="http://schemas.microsoft.com/office/drawing/2010/main" xmlns="">
                 <a:solidFill>
                   <a:schemeClr val="accent1"/>
                 </a:solidFill>
               </a14:hiddenFill>
             </a:ext>
             <a:ext uri="{91240B29-F687-4f45-9708-019B960494DF}">
-              <a14:hiddenLine xmlns="" xmlns:a14="http://schemas.microsoft.com/office/drawing/2010/main" w="9525">
+              <a14:hiddenLine xmlns:a14="http://schemas.microsoft.com/office/drawing/2010/main" xmlns="" w="9525">
                 <a:solidFill>
                   <a:schemeClr val="tx1"/>
                 </a:solidFill>
@@ -798,7 +793,7 @@
               </a14:hiddenLine>
             </a:ext>
             <a:ext uri="{AF507438-7753-43e0-B8FC-AC1667EBCBE1}">
-              <a14:hiddenEffects xmlns="" xmlns:a14="http://schemas.microsoft.com/office/drawing/2010/main">
+              <a14:hiddenEffects xmlns:a14="http://schemas.microsoft.com/office/drawing/2010/main" xmlns="">
                 <a:effectLst>
                   <a:outerShdw blurRad="63500" dist="38099" dir="2700000" algn="ctr" rotWithShape="0">
                     <a:schemeClr val="bg2">
@@ -809,7 +804,7 @@
               </a14:hiddenEffects>
             </a:ext>
             <a:ext uri="{FAA26D3D-D897-4be2-8F04-BA451C77F1D7}">
-              <ma14:placeholderFlag xmlns="" xmlns:ma14="http://schemas.microsoft.com/office/mac/drawingml/2011/main" val="1"/>
+              <ma14:placeholderFlag xmlns:ma14="http://schemas.microsoft.com/office/mac/drawingml/2011/main" xmlns="" val="1"/>
             </a:ext>
           </a:extLst>
         </p:spPr>
@@ -827,7 +822,7 @@
           <a:p>
             <a:fld id="{2802B35E-981B-4772-B04D-75CC2431A8B0}" type="datetime1">
               <a:rPr lang="nl-NL" altLang="nl-NL" smtClean="0"/>
-              <a:t>4-5-2026</a:t>
+              <a:t>12-5-2026</a:t>
             </a:fld>
             <a:endParaRPr lang="en-US" altLang="nl-NL"/>
           </a:p>
@@ -863,7 +858,7 @@
           <a:effectLst/>
           <a:extLst>
             <a:ext uri="{AF507438-7753-43e0-B8FC-AC1667EBCBE1}">
-              <a14:hiddenEffects xmlns="" xmlns:a14="http://schemas.microsoft.com/office/drawing/2010/main">
+              <a14:hiddenEffects xmlns:a14="http://schemas.microsoft.com/office/drawing/2010/main" xmlns="">
                 <a:effectLst>
                   <a:outerShdw blurRad="63500" dist="38099" dir="2700000" algn="ctr" rotWithShape="0">
                     <a:srgbClr val="000000">
@@ -874,7 +869,7 @@
               </a14:hiddenEffects>
             </a:ext>
             <a:ext uri="{53640926-AAD7-44d8-BBD7-CCE9431645EC}">
-              <a14:shadowObscured xmlns="" xmlns:a14="http://schemas.microsoft.com/office/drawing/2010/main" val="1"/>
+              <a14:shadowObscured xmlns:a14="http://schemas.microsoft.com/office/drawing/2010/main" xmlns="" val="1"/>
             </a:ext>
           </a:extLst>
         </p:spPr>
@@ -904,14 +899,14 @@
           <a:effectLst/>
           <a:extLst>
             <a:ext uri="{909E8E84-426E-40dd-AFC4-6F175D3DCCD1}">
-              <a14:hiddenFill xmlns="" xmlns:a14="http://schemas.microsoft.com/office/drawing/2010/main">
+              <a14:hiddenFill xmlns:a14="http://schemas.microsoft.com/office/drawing/2010/main" xmlns="">
                 <a:solidFill>
                   <a:schemeClr val="accent1"/>
                 </a:solidFill>
               </a14:hiddenFill>
             </a:ext>
             <a:ext uri="{91240B29-F687-4f45-9708-019B960494DF}">
-              <a14:hiddenLine xmlns="" xmlns:a14="http://schemas.microsoft.com/office/drawing/2010/main" w="9525">
+              <a14:hiddenLine xmlns:a14="http://schemas.microsoft.com/office/drawing/2010/main" xmlns="" w="9525">
                 <a:solidFill>
                   <a:schemeClr val="tx1"/>
                 </a:solidFill>
@@ -921,7 +916,7 @@
               </a14:hiddenLine>
             </a:ext>
             <a:ext uri="{AF507438-7753-43e0-B8FC-AC1667EBCBE1}">
-              <a14:hiddenEffects xmlns="" xmlns:a14="http://schemas.microsoft.com/office/drawing/2010/main">
+              <a14:hiddenEffects xmlns:a14="http://schemas.microsoft.com/office/drawing/2010/main" xmlns="">
                 <a:effectLst>
                   <a:outerShdw blurRad="63500" dist="38099" dir="2700000" algn="ctr" rotWithShape="0">
                     <a:schemeClr val="bg2">
@@ -932,7 +927,7 @@
               </a14:hiddenEffects>
             </a:ext>
             <a:ext uri="{FAA26D3D-D897-4be2-8F04-BA451C77F1D7}">
-              <ma14:placeholderFlag xmlns="" xmlns:ma14="http://schemas.microsoft.com/office/mac/drawingml/2011/main" val="1"/>
+              <ma14:placeholderFlag xmlns:ma14="http://schemas.microsoft.com/office/mac/drawingml/2011/main" xmlns="" val="1"/>
             </a:ext>
           </a:extLst>
         </p:spPr>
@@ -1005,14 +1000,14 @@
           <a:effectLst/>
           <a:extLst>
             <a:ext uri="{909E8E84-426E-40dd-AFC4-6F175D3DCCD1}">
-              <a14:hiddenFill xmlns="" xmlns:a14="http://schemas.microsoft.com/office/drawing/2010/main">
+              <a14:hiddenFill xmlns:a14="http://schemas.microsoft.com/office/drawing/2010/main" xmlns="">
                 <a:solidFill>
                   <a:schemeClr val="accent1"/>
                 </a:solidFill>
               </a14:hiddenFill>
             </a:ext>
             <a:ext uri="{91240B29-F687-4f45-9708-019B960494DF}">
-              <a14:hiddenLine xmlns="" xmlns:a14="http://schemas.microsoft.com/office/drawing/2010/main" w="9525">
+              <a14:hiddenLine xmlns:a14="http://schemas.microsoft.com/office/drawing/2010/main" xmlns="" w="9525">
                 <a:solidFill>
                   <a:schemeClr val="tx1"/>
                 </a:solidFill>
@@ -1022,7 +1017,7 @@
               </a14:hiddenLine>
             </a:ext>
             <a:ext uri="{AF507438-7753-43e0-B8FC-AC1667EBCBE1}">
-              <a14:hiddenEffects xmlns="" xmlns:a14="http://schemas.microsoft.com/office/drawing/2010/main">
+              <a14:hiddenEffects xmlns:a14="http://schemas.microsoft.com/office/drawing/2010/main" xmlns="">
                 <a:effectLst>
                   <a:outerShdw blurRad="63500" dist="38099" dir="2700000" algn="ctr" rotWithShape="0">
                     <a:schemeClr val="bg2">
@@ -1033,7 +1028,7 @@
               </a14:hiddenEffects>
             </a:ext>
             <a:ext uri="{FAA26D3D-D897-4be2-8F04-BA451C77F1D7}">
-              <ma14:placeholderFlag xmlns="" xmlns:ma14="http://schemas.microsoft.com/office/mac/drawingml/2011/main" val="1"/>
+              <ma14:placeholderFlag xmlns:ma14="http://schemas.microsoft.com/office/mac/drawingml/2011/main" xmlns="" val="1"/>
             </a:ext>
           </a:extLst>
         </p:spPr>
@@ -1087,14 +1082,14 @@
           <a:effectLst/>
           <a:extLst>
             <a:ext uri="{909E8E84-426E-40dd-AFC4-6F175D3DCCD1}">
-              <a14:hiddenFill xmlns="" xmlns:a14="http://schemas.microsoft.com/office/drawing/2010/main">
+              <a14:hiddenFill xmlns:a14="http://schemas.microsoft.com/office/drawing/2010/main" xmlns="">
                 <a:solidFill>
                   <a:schemeClr val="accent1"/>
                 </a:solidFill>
               </a14:hiddenFill>
             </a:ext>
             <a:ext uri="{91240B29-F687-4f45-9708-019B960494DF}">
-              <a14:hiddenLine xmlns="" xmlns:a14="http://schemas.microsoft.com/office/drawing/2010/main" w="9525">
+              <a14:hiddenLine xmlns:a14="http://schemas.microsoft.com/office/drawing/2010/main" xmlns="" w="9525">
                 <a:solidFill>
                   <a:schemeClr val="tx1"/>
                 </a:solidFill>
@@ -1104,7 +1099,7 @@
               </a14:hiddenLine>
             </a:ext>
             <a:ext uri="{AF507438-7753-43e0-B8FC-AC1667EBCBE1}">
-              <a14:hiddenEffects xmlns="" xmlns:a14="http://schemas.microsoft.com/office/drawing/2010/main">
+              <a14:hiddenEffects xmlns:a14="http://schemas.microsoft.com/office/drawing/2010/main" xmlns="">
                 <a:effectLst>
                   <a:outerShdw blurRad="63500" dist="38099" dir="2700000" algn="ctr" rotWithShape="0">
                     <a:schemeClr val="bg2">
@@ -1115,7 +1110,7 @@
               </a14:hiddenEffects>
             </a:ext>
             <a:ext uri="{FAA26D3D-D897-4be2-8F04-BA451C77F1D7}">
-              <ma14:placeholderFlag xmlns="" xmlns:ma14="http://schemas.microsoft.com/office/mac/drawingml/2011/main" val="1"/>
+              <ma14:placeholderFlag xmlns:ma14="http://schemas.microsoft.com/office/mac/drawingml/2011/main" xmlns="" val="1"/>
             </a:ext>
           </a:extLst>
         </p:spPr>
@@ -1134,7 +1129,7 @@
             <a:fld id="{BB22E908-7DBC-4D32-B654-1FA166BAB2FA}" type="slidenum">
               <a:rPr lang="en-US" altLang="nl-NL"/>
               <a:pPr/>
-              <a:t>‹#›</a:t>
+              <a:t>‹nr.›</a:t>
             </a:fld>
             <a:endParaRPr lang="en-US" altLang="nl-NL"/>
           </a:p>
@@ -1651,230 +1646,6 @@
         <p:cNvPr id="1" name="">
           <a:extLst>
             <a:ext uri="{FF2B5EF4-FFF2-40B4-BE49-F238E27FC236}">
-              <a16:creationId xmlns:a16="http://schemas.microsoft.com/office/drawing/2014/main" id="{1CEB7835-F26D-B5CD-AAD2-CC6B3ABB8D9F}"/>
-            </a:ext>
-          </a:extLst>
-        </p:cNvPr>
-        <p:cNvGrpSpPr/>
-        <p:nvPr/>
-      </p:nvGrpSpPr>
-      <p:grpSpPr>
-        <a:xfrm>
-          <a:off x="0" y="0"/>
-          <a:ext cx="0" cy="0"/>
-          <a:chOff x="0" y="0"/>
-          <a:chExt cx="0" cy="0"/>
-        </a:xfrm>
-      </p:grpSpPr>
-      <p:sp>
-        <p:nvSpPr>
-          <p:cNvPr id="2" name="Tijdelijke aanduiding voor dia-afbeelding 1">
-            <a:extLst>
-              <a:ext uri="{FF2B5EF4-FFF2-40B4-BE49-F238E27FC236}">
-                <a16:creationId xmlns:a16="http://schemas.microsoft.com/office/drawing/2014/main" id="{794FD683-A5B3-2F2C-2FB4-5BC7E3C99398}"/>
-              </a:ext>
-            </a:extLst>
-          </p:cNvPr>
-          <p:cNvSpPr>
-            <a:spLocks noGrp="1" noRot="1" noChangeAspect="1"/>
-          </p:cNvSpPr>
-          <p:nvPr>
-            <p:ph type="sldImg"/>
-          </p:nvPr>
-        </p:nvSpPr>
-        <p:spPr/>
-      </p:sp>
-      <p:sp>
-        <p:nvSpPr>
-          <p:cNvPr id="3" name="Tijdelijke aanduiding voor notities 2">
-            <a:extLst>
-              <a:ext uri="{FF2B5EF4-FFF2-40B4-BE49-F238E27FC236}">
-                <a16:creationId xmlns:a16="http://schemas.microsoft.com/office/drawing/2014/main" id="{2CB5F469-A276-C740-0610-E74808949884}"/>
-              </a:ext>
-            </a:extLst>
-          </p:cNvPr>
-          <p:cNvSpPr>
-            <a:spLocks noGrp="1"/>
-          </p:cNvSpPr>
-          <p:nvPr>
-            <p:ph type="body" idx="1"/>
-          </p:nvPr>
-        </p:nvSpPr>
-        <p:spPr/>
-        <p:txBody>
-          <a:bodyPr/>
-          <a:lstStyle/>
-          <a:p>
-            <a:r>
-              <a:rPr lang="nl-NL" sz="1200" b="1" kern="1200" dirty="0">
-                <a:solidFill>
-                  <a:schemeClr val="tx1"/>
-                </a:solidFill>
-                <a:effectLst/>
-                <a:latin typeface="Arial" charset="0"/>
-                <a:ea typeface="MS PGothic" panose="020B0600070205080204" pitchFamily="34" charset="-128"/>
-                <a:cs typeface="+mn-cs"/>
-              </a:rPr>
-              <a:t>LET OP: pak de juiste slide erbij</a:t>
-            </a:r>
-          </a:p>
-          <a:p>
-            <a:endParaRPr lang="nl-NL" sz="1200" b="1" kern="1200" dirty="0">
-              <a:solidFill>
-                <a:schemeClr val="tx1"/>
-              </a:solidFill>
-              <a:effectLst/>
-              <a:latin typeface="Arial" charset="0"/>
-              <a:ea typeface="MS PGothic" panose="020B0600070205080204" pitchFamily="34" charset="-128"/>
-              <a:cs typeface="+mn-cs"/>
-            </a:endParaRPr>
-          </a:p>
-          <a:p>
-            <a:r>
-              <a:rPr lang="nl-NL" sz="1200" b="1" kern="1200" dirty="0">
-                <a:solidFill>
-                  <a:schemeClr val="tx1"/>
-                </a:solidFill>
-                <a:effectLst/>
-                <a:latin typeface="Arial" charset="0"/>
-                <a:ea typeface="MS PGothic" panose="020B0600070205080204" pitchFamily="34" charset="-128"/>
-                <a:cs typeface="+mn-cs"/>
-              </a:rPr>
-              <a:t>Vragen bedenken</a:t>
-            </a:r>
-            <a:endParaRPr lang="nl-NL" sz="1200" b="0" kern="1200" dirty="0">
-              <a:solidFill>
-                <a:schemeClr val="tx1"/>
-              </a:solidFill>
-              <a:effectLst/>
-              <a:latin typeface="Arial" charset="0"/>
-              <a:ea typeface="MS PGothic" panose="020B0600070205080204" pitchFamily="34" charset="-128"/>
-              <a:cs typeface="+mn-cs"/>
-            </a:endParaRPr>
-          </a:p>
-          <a:p>
-            <a:r>
-              <a:rPr lang="nl-NL" sz="1200" kern="1200" dirty="0">
-                <a:solidFill>
-                  <a:schemeClr val="tx1"/>
-                </a:solidFill>
-                <a:effectLst/>
-                <a:latin typeface="Arial" charset="0"/>
-                <a:ea typeface="MS PGothic" panose="020B0600070205080204" pitchFamily="34" charset="-128"/>
-                <a:cs typeface="+mn-cs"/>
-              </a:rPr>
-              <a:t>Student</a:t>
-            </a:r>
-          </a:p>
-          <a:p>
-            <a:r>
-              <a:rPr lang="nl-NL" sz="1200" kern="1200" dirty="0">
-                <a:solidFill>
-                  <a:schemeClr val="tx1"/>
-                </a:solidFill>
-                <a:effectLst/>
-                <a:latin typeface="Arial" charset="0"/>
-                <a:ea typeface="MS PGothic" panose="020B0600070205080204" pitchFamily="34" charset="-128"/>
-                <a:cs typeface="+mn-cs"/>
-              </a:rPr>
-              <a:t>Studenten gaan met de experts van de groepjes per richting bij elkaar zitten en bedenken minimaal 3 vragen voor de desbetreffende afstudeerrichting. Als er een vraag is voor een andere afstudeerrichting dan waar je in zit mag deze aan die richting gegeven worden.</a:t>
-            </a:r>
-          </a:p>
-          <a:p>
-            <a:r>
-              <a:rPr lang="nl-NL" sz="1200" kern="1200" dirty="0">
-                <a:solidFill>
-                  <a:schemeClr val="tx1"/>
-                </a:solidFill>
-                <a:effectLst/>
-                <a:latin typeface="Arial" charset="0"/>
-                <a:ea typeface="MS PGothic" panose="020B0600070205080204" pitchFamily="34" charset="-128"/>
-                <a:cs typeface="+mn-cs"/>
-              </a:rPr>
-              <a:t>Probeer de vragen te categoriseren</a:t>
-            </a:r>
-          </a:p>
-          <a:p>
-            <a:r>
-              <a:rPr lang="nl-NL" sz="1200" kern="1200" dirty="0">
-                <a:solidFill>
-                  <a:schemeClr val="tx1"/>
-                </a:solidFill>
-                <a:effectLst/>
-                <a:latin typeface="Arial" charset="0"/>
-                <a:ea typeface="MS PGothic" panose="020B0600070205080204" pitchFamily="34" charset="-128"/>
-                <a:cs typeface="+mn-cs"/>
-              </a:rPr>
-              <a:t>Elk groepje is verantwoordelijk voor de vragen van een richting.</a:t>
-            </a:r>
-          </a:p>
-          <a:p>
-            <a:r>
-              <a:rPr lang="nl-NL" sz="1200" kern="1200" dirty="0">
-                <a:solidFill>
-                  <a:schemeClr val="tx1"/>
-                </a:solidFill>
-                <a:effectLst/>
-                <a:latin typeface="Arial" charset="0"/>
-                <a:ea typeface="MS PGothic" panose="020B0600070205080204" pitchFamily="34" charset="-128"/>
-                <a:cs typeface="+mn-cs"/>
-              </a:rPr>
-              <a:t>Studenten mogen natuurlijk ook spontaan vragen stellen.</a:t>
-            </a:r>
-            <a:endParaRPr lang="nl-NL" dirty="0"/>
-          </a:p>
-        </p:txBody>
-      </p:sp>
-      <p:sp>
-        <p:nvSpPr>
-          <p:cNvPr id="4" name="Tijdelijke aanduiding voor dianummer 3">
-            <a:extLst>
-              <a:ext uri="{FF2B5EF4-FFF2-40B4-BE49-F238E27FC236}">
-                <a16:creationId xmlns:a16="http://schemas.microsoft.com/office/drawing/2014/main" id="{B6C01851-97B2-2E91-4AE8-1F156FA0A621}"/>
-              </a:ext>
-            </a:extLst>
-          </p:cNvPr>
-          <p:cNvSpPr>
-            <a:spLocks noGrp="1"/>
-          </p:cNvSpPr>
-          <p:nvPr>
-            <p:ph type="sldNum" sz="quarter" idx="5"/>
-          </p:nvPr>
-        </p:nvSpPr>
-        <p:spPr/>
-        <p:txBody>
-          <a:bodyPr/>
-          <a:lstStyle/>
-          <a:p>
-            <a:fld id="{25AFEC66-6BFA-9A4F-8C14-93D2FB19A680}" type="slidenum">
-              <a:rPr lang="nl-NL" smtClean="0"/>
-              <a:t>3</a:t>
-            </a:fld>
-            <a:endParaRPr lang="nl-NL"/>
-          </a:p>
-        </p:txBody>
-      </p:sp>
-    </p:spTree>
-    <p:extLst>
-      <p:ext uri="{BB962C8B-B14F-4D97-AF65-F5344CB8AC3E}">
-        <p14:creationId xmlns:p14="http://schemas.microsoft.com/office/powerpoint/2010/main" val="3342659220"/>
-      </p:ext>
-    </p:extLst>
-  </p:cSld>
-  <p:clrMapOvr>
-    <a:masterClrMapping/>
-  </p:clrMapOvr>
-</p:notes>
-</file>
-
-<file path=ppt/notesSlides/notesSlide4.xml><?xml version="1.0" encoding="utf-8"?>
-<p:notes xmlns:a="http://schemas.openxmlformats.org/drawingml/2006/main" xmlns:r="http://schemas.openxmlformats.org/officeDocument/2006/relationships" xmlns:p="http://schemas.openxmlformats.org/presentationml/2006/main">
-  <p:cSld>
-    <p:spTree>
-      <p:nvGrpSpPr>
-        <p:cNvPr id="1" name="">
-          <a:extLst>
-            <a:ext uri="{FF2B5EF4-FFF2-40B4-BE49-F238E27FC236}">
               <a16:creationId xmlns:a16="http://schemas.microsoft.com/office/drawing/2014/main" id="{C2AB561B-1469-21D4-EBDF-88774BE2E262}"/>
             </a:ext>
           </a:extLst>
@@ -2072,7 +1843,7 @@
           <a:p>
             <a:fld id="{25AFEC66-6BFA-9A4F-8C14-93D2FB19A680}" type="slidenum">
               <a:rPr lang="nl-NL" smtClean="0"/>
-              <a:t>4</a:t>
+              <a:t>3</a:t>
             </a:fld>
             <a:endParaRPr lang="nl-NL"/>
           </a:p>
@@ -2169,7 +1940,7 @@
           <a:p>
             <a:fld id="{6FBE2429-3394-4D2F-AD24-5EABA86125D2}" type="datetime1">
               <a:rPr lang="en-US" smtClean="0"/>
-              <a:t>5/4/2026</a:t>
+              <a:t>5/12/2026</a:t>
             </a:fld>
             <a:endParaRPr lang="nl-NL"/>
           </a:p>
@@ -2238,7 +2009,7 @@
             <a:fld id="{82F1406F-2017-4431-B79A-7DFC81A4E36B}" type="slidenum">
               <a:rPr lang="nl-NL" smtClean="0"/>
               <a:pPr/>
-              <a:t>‹#›</a:t>
+              <a:t>‹nr.›</a:t>
             </a:fld>
             <a:endParaRPr lang="nl-NL"/>
           </a:p>
@@ -2494,7 +2265,7 @@
           <a:p>
             <a:fld id="{16734E01-D590-442B-B31B-FE10FED18193}" type="datetime1">
               <a:rPr lang="en-US" smtClean="0"/>
-              <a:t>5/4/2026</a:t>
+              <a:t>5/12/2026</a:t>
             </a:fld>
             <a:endParaRPr lang="nl-NL"/>
           </a:p>
@@ -2574,7 +2345,7 @@
             <a:fld id="{82F1406F-2017-4431-B79A-7DFC81A4E36B}" type="slidenum">
               <a:rPr lang="nl-NL" smtClean="0"/>
               <a:pPr/>
-              <a:t>‹#›</a:t>
+              <a:t>‹nr.›</a:t>
             </a:fld>
             <a:endParaRPr lang="nl-NL"/>
           </a:p>
@@ -2832,7 +2603,7 @@
           <a:p>
             <a:fld id="{56AB6A4D-1945-47DE-BAFF-682D7CF56FF2}" type="datetime1">
               <a:rPr lang="en-US" smtClean="0"/>
-              <a:t>5/4/2026</a:t>
+              <a:t>5/12/2026</a:t>
             </a:fld>
             <a:endParaRPr lang="nl-NL"/>
           </a:p>
@@ -2891,7 +2662,7 @@
             <a:fld id="{82F1406F-2017-4431-B79A-7DFC81A4E36B}" type="slidenum">
               <a:rPr lang="nl-NL" smtClean="0"/>
               <a:pPr/>
-              <a:t>‹#›</a:t>
+              <a:t>‹nr.›</a:t>
             </a:fld>
             <a:endParaRPr lang="nl-NL"/>
           </a:p>
@@ -3188,7 +2959,7 @@
           <a:p>
             <a:fld id="{AE5C9FBB-E996-401B-A15A-B30463621E74}" type="datetime1">
               <a:rPr lang="en-US" smtClean="0"/>
-              <a:t>5/4/2026</a:t>
+              <a:t>5/12/2026</a:t>
             </a:fld>
             <a:endParaRPr lang="nl-NL"/>
           </a:p>
@@ -3247,7 +3018,7 @@
             <a:fld id="{82F1406F-2017-4431-B79A-7DFC81A4E36B}" type="slidenum">
               <a:rPr lang="nl-NL" smtClean="0"/>
               <a:pPr/>
-              <a:t>‹#›</a:t>
+              <a:t>‹nr.›</a:t>
             </a:fld>
             <a:endParaRPr lang="nl-NL"/>
           </a:p>
@@ -3434,7 +3205,7 @@
           <a:p>
             <a:fld id="{A1D86A16-1316-40EA-ACBE-8B2631E6FF9F}" type="datetime1">
               <a:rPr lang="en-US" smtClean="0"/>
-              <a:t>5/4/2026</a:t>
+              <a:t>5/12/2026</a:t>
             </a:fld>
             <a:endParaRPr lang="nl-NL"/>
           </a:p>
@@ -3509,7 +3280,7 @@
             <a:fld id="{82F1406F-2017-4431-B79A-7DFC81A4E36B}" type="slidenum">
               <a:rPr lang="nl-NL" smtClean="0"/>
               <a:pPr/>
-              <a:t>‹#›</a:t>
+              <a:t>‹nr.›</a:t>
             </a:fld>
             <a:endParaRPr lang="nl-NL"/>
           </a:p>
@@ -3792,7 +3563,7 @@
           <a:p>
             <a:fld id="{2411F2CB-B58B-4B3B-99BD-F8BF469ACBEE}" type="datetime1">
               <a:rPr lang="en-US" smtClean="0"/>
-              <a:t>5/4/2026</a:t>
+              <a:t>5/12/2026</a:t>
             </a:fld>
             <a:endParaRPr lang="nl-NL"/>
           </a:p>
@@ -3851,7 +3622,7 @@
             <a:fld id="{82F1406F-2017-4431-B79A-7DFC81A4E36B}" type="slidenum">
               <a:rPr lang="nl-NL" smtClean="0"/>
               <a:pPr/>
-              <a:t>‹#›</a:t>
+              <a:t>‹nr.›</a:t>
             </a:fld>
             <a:endParaRPr lang="nl-NL"/>
           </a:p>
@@ -4069,7 +3840,7 @@
           <a:p>
             <a:fld id="{9ABD780B-88DC-493B-A593-4A4CB2D84C3B}" type="datetime1">
               <a:rPr lang="en-US" smtClean="0"/>
-              <a:t>5/4/2026</a:t>
+              <a:t>5/12/2026</a:t>
             </a:fld>
             <a:endParaRPr lang="nl-NL"/>
           </a:p>
@@ -4144,7 +3915,7 @@
             <a:fld id="{82F1406F-2017-4431-B79A-7DFC81A4E36B}" type="slidenum">
               <a:rPr lang="nl-NL" smtClean="0"/>
               <a:pPr/>
-              <a:t>‹#›</a:t>
+              <a:t>‹nr.›</a:t>
             </a:fld>
             <a:endParaRPr lang="nl-NL"/>
           </a:p>
@@ -4395,7 +4166,7 @@
           <a:p>
             <a:fld id="{619B05D6-86B8-4218-9682-953FF99C49E4}" type="datetime1">
               <a:rPr lang="en-US" smtClean="0"/>
-              <a:t>5/4/2026</a:t>
+              <a:t>5/12/2026</a:t>
             </a:fld>
             <a:endParaRPr lang="nl-NL"/>
           </a:p>
@@ -4454,7 +4225,7 @@
             <a:fld id="{82F1406F-2017-4431-B79A-7DFC81A4E36B}" type="slidenum">
               <a:rPr lang="nl-NL" smtClean="0"/>
               <a:pPr/>
-              <a:t>‹#›</a:t>
+              <a:t>‹nr.›</a:t>
             </a:fld>
             <a:endParaRPr lang="nl-NL"/>
           </a:p>
@@ -4642,7 +4413,7 @@
           <a:p>
             <a:fld id="{96E4080C-BA09-4263-8B37-85DB698DA235}" type="datetime1">
               <a:rPr lang="en-US" smtClean="0"/>
-              <a:t>5/4/2026</a:t>
+              <a:t>5/12/2026</a:t>
             </a:fld>
             <a:endParaRPr lang="nl-NL"/>
           </a:p>
@@ -4717,7 +4488,7 @@
             <a:fld id="{82F1406F-2017-4431-B79A-7DFC81A4E36B}" type="slidenum">
               <a:rPr lang="nl-NL" smtClean="0"/>
               <a:pPr/>
-              <a:t>‹#›</a:t>
+              <a:t>‹nr.›</a:t>
             </a:fld>
             <a:endParaRPr lang="nl-NL"/>
           </a:p>
@@ -5283,7 +5054,7 @@
           <a:p>
             <a:fld id="{5E437D89-8F6D-4346-831F-8A669749D0AA}" type="datetime1">
               <a:rPr lang="en-US" smtClean="0"/>
-              <a:t>5/4/2026</a:t>
+              <a:t>5/12/2026</a:t>
             </a:fld>
             <a:endParaRPr lang="nl-NL"/>
           </a:p>
@@ -5358,7 +5129,7 @@
             <a:fld id="{82F1406F-2017-4431-B79A-7DFC81A4E36B}" type="slidenum">
               <a:rPr lang="nl-NL" smtClean="0"/>
               <a:pPr/>
-              <a:t>‹#›</a:t>
+              <a:t>‹nr.›</a:t>
             </a:fld>
             <a:endParaRPr lang="nl-NL"/>
           </a:p>
@@ -5455,7 +5226,7 @@
           <a:p>
             <a:fld id="{C64382B0-5218-4485-9784-F5CE4DEC3F99}" type="datetime1">
               <a:rPr lang="en-US" smtClean="0"/>
-              <a:t>5/4/2026</a:t>
+              <a:t>5/12/2026</a:t>
             </a:fld>
             <a:endParaRPr lang="nl-NL"/>
           </a:p>
@@ -5524,7 +5295,7 @@
             <a:fld id="{82F1406F-2017-4431-B79A-7DFC81A4E36B}" type="slidenum">
               <a:rPr lang="nl-NL" smtClean="0"/>
               <a:pPr/>
-              <a:t>‹#›</a:t>
+              <a:t>‹nr.›</a:t>
             </a:fld>
             <a:endParaRPr lang="nl-NL"/>
           </a:p>
@@ -5734,7 +5505,7 @@
           <a:p>
             <a:fld id="{4B202C83-CF6B-4CB4-A3C5-136B676E759A}" type="datetime1">
               <a:rPr lang="en-US" smtClean="0"/>
-              <a:t>5/4/2026</a:t>
+              <a:t>5/12/2026</a:t>
             </a:fld>
             <a:endParaRPr lang="nl-NL"/>
           </a:p>
@@ -5809,7 +5580,7 @@
             <a:fld id="{82F1406F-2017-4431-B79A-7DFC81A4E36B}" type="slidenum">
               <a:rPr lang="nl-NL" smtClean="0"/>
               <a:pPr/>
-              <a:t>‹#›</a:t>
+              <a:t>‹nr.›</a:t>
             </a:fld>
             <a:endParaRPr lang="nl-NL"/>
           </a:p>
@@ -5908,7 +5679,7 @@
           <a:p>
             <a:fld id="{63A86145-E806-4748-B60F-3B208FA67D04}" type="datetime1">
               <a:rPr lang="en-US" smtClean="0"/>
-              <a:t>5/4/2026</a:t>
+              <a:t>5/12/2026</a:t>
             </a:fld>
             <a:endParaRPr lang="nl-NL"/>
           </a:p>
@@ -5967,7 +5738,7 @@
             <a:fld id="{82F1406F-2017-4431-B79A-7DFC81A4E36B}" type="slidenum">
               <a:rPr lang="nl-NL" smtClean="0"/>
               <a:pPr/>
-              <a:t>‹#›</a:t>
+              <a:t>‹nr.›</a:t>
             </a:fld>
             <a:endParaRPr lang="nl-NL"/>
           </a:p>
@@ -6166,7 +5937,7 @@
           <a:p>
             <a:fld id="{9DC9F321-131A-4464-B26F-3DE164580998}" type="datetime1">
               <a:rPr lang="en-US" smtClean="0"/>
-              <a:t>5/4/2026</a:t>
+              <a:t>5/12/2026</a:t>
             </a:fld>
             <a:endParaRPr lang="en-US"/>
           </a:p>
@@ -6224,7 +5995,7 @@
           <a:p>
             <a:fld id="{378DF747-8C7E-42F0-ABD7-47587DAC082D}" type="slidenum">
               <a:rPr lang="en-US" smtClean="0"/>
-              <a:t>‹#›</a:t>
+              <a:t>‹nr.›</a:t>
             </a:fld>
             <a:endParaRPr lang="en-US"/>
           </a:p>
@@ -6390,7 +6161,7 @@
           <a:p>
             <a:fld id="{C6A87EB0-489E-4691-ADF0-E061285BBA69}" type="datetime1">
               <a:rPr lang="en-US" smtClean="0"/>
-              <a:t>5/4/2026</a:t>
+              <a:t>5/12/2026</a:t>
             </a:fld>
             <a:endParaRPr lang="en-US"/>
           </a:p>
@@ -6448,7 +6219,7 @@
           <a:p>
             <a:fld id="{378DF747-8C7E-42F0-ABD7-47587DAC082D}" type="slidenum">
               <a:rPr lang="en-US" smtClean="0"/>
-              <a:t>‹#›</a:t>
+              <a:t>‹nr.›</a:t>
             </a:fld>
             <a:endParaRPr lang="en-US"/>
           </a:p>
@@ -11606,7 +11377,7 @@
           <a:p>
             <a:fld id="{0F344198-347E-4968-8A5E-24FAF398C80A}" type="datetime1">
               <a:rPr lang="en-US" smtClean="0"/>
-              <a:t>5/4/2026</a:t>
+              <a:t>5/12/2026</a:t>
             </a:fld>
             <a:endParaRPr lang="nl-NL"/>
           </a:p>
@@ -11675,7 +11446,7 @@
             <a:fld id="{82F1406F-2017-4431-B79A-7DFC81A4E36B}" type="slidenum">
               <a:rPr lang="nl-NL" smtClean="0"/>
               <a:pPr/>
-              <a:t>‹#›</a:t>
+              <a:t>‹nr.›</a:t>
             </a:fld>
             <a:endParaRPr lang="nl-NL"/>
           </a:p>
@@ -11952,7 +11723,7 @@
           <a:p>
             <a:fld id="{E0F52BC7-4251-4386-84EB-B9E3042EAC7A}" type="datetime1">
               <a:rPr lang="en-US" smtClean="0"/>
-              <a:t>5/4/2026</a:t>
+              <a:t>5/12/2026</a:t>
             </a:fld>
             <a:endParaRPr lang="nl-NL"/>
           </a:p>
@@ -12021,7 +11792,7 @@
             <a:fld id="{82F1406F-2017-4431-B79A-7DFC81A4E36B}" type="slidenum">
               <a:rPr lang="nl-NL" smtClean="0"/>
               <a:pPr/>
-              <a:t>‹#›</a:t>
+              <a:t>‹nr.›</a:t>
             </a:fld>
             <a:endParaRPr lang="nl-NL"/>
           </a:p>
@@ -12254,7 +12025,7 @@
           <a:p>
             <a:fld id="{A09D2FD6-A4EA-47AF-92F4-E02146872DB1}" type="datetime1">
               <a:rPr lang="en-US" smtClean="0"/>
-              <a:t>5/4/2026</a:t>
+              <a:t>5/12/2026</a:t>
             </a:fld>
             <a:endParaRPr lang="nl-NL"/>
           </a:p>
@@ -12323,7 +12094,7 @@
             <a:fld id="{82F1406F-2017-4431-B79A-7DFC81A4E36B}" type="slidenum">
               <a:rPr lang="nl-NL" smtClean="0"/>
               <a:pPr/>
-              <a:t>‹#›</a:t>
+              <a:t>‹nr.›</a:t>
             </a:fld>
             <a:endParaRPr lang="nl-NL"/>
           </a:p>
@@ -12523,7 +12294,7 @@
           <a:p>
             <a:fld id="{1F2FEB28-E807-40A4-9055-525CD06B5082}" type="datetime1">
               <a:rPr lang="en-US" smtClean="0"/>
-              <a:t>5/4/2026</a:t>
+              <a:t>5/12/2026</a:t>
             </a:fld>
             <a:endParaRPr lang="nl-NL"/>
           </a:p>
@@ -12592,7 +12363,7 @@
             <a:fld id="{82F1406F-2017-4431-B79A-7DFC81A4E36B}" type="slidenum">
               <a:rPr lang="nl-NL" smtClean="0"/>
               <a:pPr/>
-              <a:t>‹#›</a:t>
+              <a:t>‹nr.›</a:t>
             </a:fld>
             <a:endParaRPr lang="nl-NL"/>
           </a:p>
@@ -12667,7 +12438,7 @@
           <a:p>
             <a:fld id="{AE9478F3-55F5-463C-8DD4-17D1FC1FACF4}" type="datetime1">
               <a:rPr lang="en-US" smtClean="0"/>
-              <a:t>5/4/2026</a:t>
+              <a:t>5/12/2026</a:t>
             </a:fld>
             <a:endParaRPr lang="nl-NL"/>
           </a:p>
@@ -12736,7 +12507,7 @@
             <a:fld id="{82F1406F-2017-4431-B79A-7DFC81A4E36B}" type="slidenum">
               <a:rPr lang="nl-NL" smtClean="0"/>
               <a:pPr/>
-              <a:t>‹#›</a:t>
+              <a:t>‹nr.›</a:t>
             </a:fld>
             <a:endParaRPr lang="nl-NL"/>
           </a:p>
@@ -12865,7 +12636,7 @@
             <a:fld id="{82F1406F-2017-4431-B79A-7DFC81A4E36B}" type="slidenum">
               <a:rPr lang="nl-NL" smtClean="0"/>
               <a:pPr/>
-              <a:t>‹#›</a:t>
+              <a:t>‹nr.›</a:t>
             </a:fld>
             <a:endParaRPr lang="nl-NL"/>
           </a:p>
@@ -12949,7 +12720,7 @@
           <a:p>
             <a:fld id="{D1E44E4F-F209-4BD9-8EDA-84907311B367}" type="datetime1">
               <a:rPr lang="en-US" smtClean="0"/>
-              <a:t>5/4/2026</a:t>
+              <a:t>5/12/2026</a:t>
             </a:fld>
             <a:endParaRPr lang="nl-NL"/>
           </a:p>
@@ -13214,7 +12985,7 @@
           <a:p>
             <a:fld id="{52DBBD6E-4801-4C8F-8ED0-C2AF858A61AA}" type="datetime1">
               <a:rPr lang="en-US" smtClean="0"/>
-              <a:t>5/4/2026</a:t>
+              <a:t>5/12/2026</a:t>
             </a:fld>
             <a:endParaRPr lang="nl-NL"/>
           </a:p>
@@ -13299,7 +13070,7 @@
             <a:fld id="{82F1406F-2017-4431-B79A-7DFC81A4E36B}" type="slidenum">
               <a:rPr lang="nl-NL" smtClean="0"/>
               <a:pPr/>
-              <a:t>‹#›</a:t>
+              <a:t>‹nr.›</a:t>
             </a:fld>
             <a:endParaRPr lang="nl-NL"/>
           </a:p>
@@ -13540,7 +13311,7 @@
           <a:p>
             <a:fld id="{E0E16A3F-A479-45AB-8C66-C5C1FECFE81B}" type="datetime1">
               <a:rPr lang="en-US" smtClean="0"/>
-              <a:t>5/4/2026</a:t>
+              <a:t>5/12/2026</a:t>
             </a:fld>
             <a:endParaRPr lang="nl-NL"/>
           </a:p>
@@ -13635,7 +13406,7 @@
             <a:fld id="{82F1406F-2017-4431-B79A-7DFC81A4E36B}" type="slidenum">
               <a:rPr lang="nl-NL" smtClean="0"/>
               <a:pPr/>
-              <a:t>‹#›</a:t>
+              <a:t>‹nr.›</a:t>
             </a:fld>
             <a:endParaRPr lang="nl-NL"/>
           </a:p>
@@ -14414,12 +14185,21 @@
         </p:nvSpPr>
         <p:spPr/>
         <p:txBody>
-          <a:bodyPr/>
+          <a:bodyPr>
+            <a:normAutofit fontScale="90000"/>
+          </a:bodyPr>
           <a:lstStyle/>
           <a:p>
             <a:r>
               <a:rPr lang="nl-NL" dirty="0"/>
-              <a:t>Programma V1P 5.034</a:t>
+              <a:t>Programma V1P/V1R 5.034</a:t>
+            </a:r>
+            <a:br>
+              <a:rPr lang="nl-NL" dirty="0"/>
+            </a:br>
+            <a:r>
+              <a:rPr lang="nl-NL" dirty="0"/>
+              <a:t>(Martijn Jansen voor de klas)</a:t>
             </a:r>
           </a:p>
         </p:txBody>
@@ -14620,234 +14400,6 @@
         <p:cNvPr id="1" name="">
           <a:extLst>
             <a:ext uri="{FF2B5EF4-FFF2-40B4-BE49-F238E27FC236}">
-              <a16:creationId xmlns:a16="http://schemas.microsoft.com/office/drawing/2014/main" id="{40975F66-99CE-0CE3-994D-75361C4A839F}"/>
-            </a:ext>
-          </a:extLst>
-        </p:cNvPr>
-        <p:cNvGrpSpPr/>
-        <p:nvPr/>
-      </p:nvGrpSpPr>
-      <p:grpSpPr>
-        <a:xfrm>
-          <a:off x="0" y="0"/>
-          <a:ext cx="0" cy="0"/>
-          <a:chOff x="0" y="0"/>
-          <a:chExt cx="0" cy="0"/>
-        </a:xfrm>
-      </p:grpSpPr>
-      <p:sp>
-        <p:nvSpPr>
-          <p:cNvPr id="5" name="Titel 4">
-            <a:extLst>
-              <a:ext uri="{FF2B5EF4-FFF2-40B4-BE49-F238E27FC236}">
-                <a16:creationId xmlns:a16="http://schemas.microsoft.com/office/drawing/2014/main" id="{A224B80A-6B15-70E1-1DB0-A5EC497AFC73}"/>
-              </a:ext>
-            </a:extLst>
-          </p:cNvPr>
-          <p:cNvSpPr>
-            <a:spLocks noGrp="1"/>
-          </p:cNvSpPr>
-          <p:nvPr>
-            <p:ph type="title"/>
-          </p:nvPr>
-        </p:nvSpPr>
-        <p:spPr/>
-        <p:txBody>
-          <a:bodyPr/>
-          <a:lstStyle/>
-          <a:p>
-            <a:r>
-              <a:rPr lang="nl-NL" dirty="0"/>
-              <a:t>Programma V1R 5.036</a:t>
-            </a:r>
-          </a:p>
-        </p:txBody>
-      </p:sp>
-      <p:sp>
-        <p:nvSpPr>
-          <p:cNvPr id="6" name="Tijdelijke aanduiding voor inhoud 5">
-            <a:extLst>
-              <a:ext uri="{FF2B5EF4-FFF2-40B4-BE49-F238E27FC236}">
-                <a16:creationId xmlns:a16="http://schemas.microsoft.com/office/drawing/2014/main" id="{E557F187-E724-1A1C-3DD8-83DC978B7EBF}"/>
-              </a:ext>
-            </a:extLst>
-          </p:cNvPr>
-          <p:cNvSpPr>
-            <a:spLocks noGrp="1"/>
-          </p:cNvSpPr>
-          <p:nvPr>
-            <p:ph sz="quarter" idx="15"/>
-          </p:nvPr>
-        </p:nvSpPr>
-        <p:spPr>
-          <a:xfrm>
-            <a:off x="971551" y="1797051"/>
-            <a:ext cx="8076777" cy="4080933"/>
-          </a:xfrm>
-        </p:spPr>
-        <p:txBody>
-          <a:bodyPr>
-            <a:normAutofit lnSpcReduction="10000"/>
-          </a:bodyPr>
-          <a:lstStyle/>
-          <a:p>
-            <a:pPr marL="0" indent="0">
-              <a:buNone/>
-            </a:pPr>
-            <a:r>
-              <a:rPr lang="en-US" dirty="0"/>
-              <a:t>09:00 – 09:15</a:t>
-            </a:r>
-            <a:r>
-              <a:rPr lang="nl-NL" dirty="0"/>
-              <a:t>	Programma uitleg / vragen herzien</a:t>
-            </a:r>
-          </a:p>
-          <a:p>
-            <a:pPr marL="0" indent="0">
-              <a:buNone/>
-            </a:pPr>
-            <a:r>
-              <a:rPr lang="nl-NL" dirty="0"/>
-              <a:t>09:15 – 10:00	SD voorlichting</a:t>
-            </a:r>
-          </a:p>
-          <a:p>
-            <a:pPr marL="0" indent="0">
-              <a:buNone/>
-            </a:pPr>
-            <a:r>
-              <a:rPr lang="nl-NL" dirty="0"/>
-              <a:t>					Door: André Donk</a:t>
-            </a:r>
-          </a:p>
-          <a:p>
-            <a:pPr marL="0" indent="0">
-              <a:buNone/>
-            </a:pPr>
-            <a:r>
-              <a:rPr lang="nl-NL" dirty="0"/>
-              <a:t>10:00 – 10:45	BIM voorlichting</a:t>
-            </a:r>
-          </a:p>
-          <a:p>
-            <a:pPr marL="0" indent="0">
-              <a:buNone/>
-            </a:pPr>
-            <a:r>
-              <a:rPr lang="nl-NL" dirty="0"/>
-              <a:t>					Door: Alex Bongers</a:t>
-            </a:r>
-          </a:p>
-          <a:p>
-            <a:pPr marL="0" indent="0">
-              <a:buNone/>
-            </a:pPr>
-            <a:r>
-              <a:rPr lang="nl-NL" dirty="0"/>
-              <a:t>10:45 – 11:30	AI voorlichting</a:t>
-            </a:r>
-          </a:p>
-          <a:p>
-            <a:pPr marL="0" indent="0">
-              <a:buNone/>
-            </a:pPr>
-            <a:r>
-              <a:rPr lang="nl-NL" dirty="0"/>
-              <a:t>					Door: Peter van der Berg</a:t>
-            </a:r>
-          </a:p>
-          <a:p>
-            <a:pPr marL="0" indent="0">
-              <a:buNone/>
-            </a:pPr>
-            <a:r>
-              <a:rPr lang="nl-NL" dirty="0"/>
-              <a:t>11:30 – 12:00	Werken aan </a:t>
-            </a:r>
-            <a:r>
-              <a:rPr lang="nl-NL" dirty="0" err="1"/>
-              <a:t>Steam</a:t>
-            </a:r>
-            <a:endParaRPr lang="nl-NL" dirty="0"/>
-          </a:p>
-          <a:p>
-            <a:pPr marL="0" indent="0">
-              <a:buNone/>
-            </a:pPr>
-            <a:r>
-              <a:rPr lang="nl-NL" dirty="0"/>
-              <a:t> </a:t>
-            </a:r>
-          </a:p>
-        </p:txBody>
-      </p:sp>
-      <p:pic>
-        <p:nvPicPr>
-          <p:cNvPr id="7" name="Picture 2" descr="http://gbw-online.nl/wp-content/uploads/2015/02/agenda-stylo.jpg">
-            <a:extLst>
-              <a:ext uri="{FF2B5EF4-FFF2-40B4-BE49-F238E27FC236}">
-                <a16:creationId xmlns:a16="http://schemas.microsoft.com/office/drawing/2014/main" id="{577698AA-89E1-C02F-E5A0-5E578322BE7A}"/>
-              </a:ext>
-            </a:extLst>
-          </p:cNvPr>
-          <p:cNvPicPr>
-            <a:picLocks noChangeAspect="1" noChangeArrowheads="1"/>
-          </p:cNvPicPr>
-          <p:nvPr/>
-        </p:nvPicPr>
-        <p:blipFill rotWithShape="1">
-          <a:blip r:embed="rId3" cstate="print">
-            <a:extLst>
-              <a:ext uri="{28A0092B-C50C-407E-A947-70E740481C1C}">
-                <a14:useLocalDpi xmlns:a14="http://schemas.microsoft.com/office/drawing/2010/main" val="0"/>
-              </a:ext>
-            </a:extLst>
-          </a:blip>
-          <a:srcRect l="30704"/>
-          <a:stretch/>
-        </p:blipFill>
-        <p:spPr bwMode="auto">
-          <a:xfrm>
-            <a:off x="9140328" y="-10929"/>
-            <a:ext cx="3051673" cy="2935874"/>
-          </a:xfrm>
-          <a:prstGeom prst="rect">
-            <a:avLst/>
-          </a:prstGeom>
-          <a:noFill/>
-          <a:extLst>
-            <a:ext uri="{909E8E84-426E-40DD-AFC4-6F175D3DCCD1}">
-              <a14:hiddenFill xmlns:a14="http://schemas.microsoft.com/office/drawing/2010/main">
-                <a:solidFill>
-                  <a:srgbClr val="FFFFFF"/>
-                </a:solidFill>
-              </a14:hiddenFill>
-            </a:ext>
-          </a:extLst>
-        </p:spPr>
-      </p:pic>
-    </p:spTree>
-    <p:extLst>
-      <p:ext uri="{BB962C8B-B14F-4D97-AF65-F5344CB8AC3E}">
-        <p14:creationId xmlns:p14="http://schemas.microsoft.com/office/powerpoint/2010/main" val="3840454017"/>
-      </p:ext>
-    </p:extLst>
-  </p:cSld>
-  <p:clrMapOvr>
-    <a:masterClrMapping/>
-  </p:clrMapOvr>
-</p:sld>
-</file>
-
-<file path=ppt/slides/slide4.xml><?xml version="1.0" encoding="utf-8"?>
-<p:sld xmlns:a="http://schemas.openxmlformats.org/drawingml/2006/main" xmlns:r="http://schemas.openxmlformats.org/officeDocument/2006/relationships" xmlns:p="http://schemas.openxmlformats.org/presentationml/2006/main">
-  <p:cSld>
-    <p:spTree>
-      <p:nvGrpSpPr>
-        <p:cNvPr id="1" name="">
-          <a:extLst>
-            <a:ext uri="{FF2B5EF4-FFF2-40B4-BE49-F238E27FC236}">
               <a16:creationId xmlns:a16="http://schemas.microsoft.com/office/drawing/2014/main" id="{70375202-9F8B-6EBD-9041-87780B2B9E97}"/>
             </a:ext>
           </a:extLst>
@@ -14881,12 +14433,21 @@
         </p:nvSpPr>
         <p:spPr/>
         <p:txBody>
-          <a:bodyPr/>
+          <a:bodyPr>
+            <a:normAutofit fontScale="90000"/>
+          </a:bodyPr>
           <a:lstStyle/>
           <a:p>
             <a:r>
               <a:rPr lang="nl-NL" dirty="0"/>
               <a:t>Programma V1S 5.038</a:t>
+            </a:r>
+            <a:br>
+              <a:rPr lang="nl-NL" dirty="0"/>
+            </a:br>
+            <a:r>
+              <a:rPr lang="nl-NL" dirty="0"/>
+              <a:t>(Hasan Kurt voor de klas)</a:t>
             </a:r>
           </a:p>
         </p:txBody>
@@ -14910,12 +14471,12 @@
         <p:spPr>
           <a:xfrm>
             <a:off x="971551" y="1797051"/>
-            <a:ext cx="8076777" cy="4080933"/>
+            <a:ext cx="8076777" cy="4734980"/>
           </a:xfrm>
         </p:spPr>
         <p:txBody>
           <a:bodyPr>
-            <a:normAutofit lnSpcReduction="10000"/>
+            <a:normAutofit fontScale="92500" lnSpcReduction="20000"/>
           </a:bodyPr>
           <a:lstStyle/>
           <a:p>
@@ -14991,12 +14552,27 @@
             </a:pPr>
             <a:r>
               <a:rPr lang="nl-NL" dirty="0"/>
-              <a:t>11:30 – 12:00	Werken aan </a:t>
-            </a:r>
-            <a:r>
-              <a:rPr lang="nl-NL" dirty="0" err="1"/>
-              <a:t>Steam</a:t>
-            </a:r>
+              <a:t>11:30 – 12:00	Werken aan Steam</a:t>
+            </a:r>
+          </a:p>
+          <a:p>
+            <a:pPr marL="0" indent="0">
+              <a:buNone/>
+            </a:pPr>
+            <a:r>
+              <a:rPr lang="nl-NL" b="1" dirty="0"/>
+              <a:t>Huiswerk</a:t>
+            </a:r>
+            <a:r>
+              <a:rPr lang="nl-NL" dirty="0"/>
+              <a:t>: verwerk opgedane kennis in Oriëntatieopdracht</a:t>
+            </a:r>
+            <a:endParaRPr lang="nl-NL" b="1" dirty="0"/>
+          </a:p>
+          <a:p>
+            <a:pPr marL="0" indent="0">
+              <a:buNone/>
+            </a:pPr>
             <a:endParaRPr lang="nl-NL" dirty="0"/>
           </a:p>
           <a:p>
@@ -16032,6 +15608,28 @@
 </file>
 
 <file path=customXml/item1.xml><?xml version="1.0" encoding="utf-8"?>
+<?mso-contentType ?>
+<FormTemplates xmlns="http://schemas.microsoft.com/sharepoint/v3/contenttype/forms">
+  <Display>DocumentLibraryForm</Display>
+  <Edit>DocumentLibraryForm</Edit>
+  <New>DocumentLibraryForm</New>
+</FormTemplates>
+</file>
+
+<file path=customXml/item2.xml><?xml version="1.0" encoding="utf-8"?>
+<p:properties xmlns:p="http://schemas.microsoft.com/office/2006/metadata/properties" xmlns:xsi="http://www.w3.org/2001/XMLSchema-instance" xmlns:pc="http://schemas.microsoft.com/office/infopath/2007/PartnerControls">
+  <documentManagement>
+    <test xmlns="8e39aab0-005d-45b6-a80e-05e5df2908d1" xsi:nil="true"/>
+    <TaxCatchAll xmlns="cc018f0f-33de-4c4c-920d-26dc6e1acc33" xsi:nil="true"/>
+    <lcf76f155ced4ddcb4097134ff3c332f xmlns="8e39aab0-005d-45b6-a80e-05e5df2908d1">
+      <Terms xmlns="http://schemas.microsoft.com/office/infopath/2007/PartnerControls"/>
+    </lcf76f155ced4ddcb4097134ff3c332f>
+    <Description xmlns="8e39aab0-005d-45b6-a80e-05e5df2908d1" xsi:nil="true"/>
+  </documentManagement>
+</p:properties>
+</file>
+
+<file path=customXml/item3.xml><?xml version="1.0" encoding="utf-8"?>
 <ct:contentTypeSchema xmlns:ct="http://schemas.microsoft.com/office/2006/metadata/contentType" xmlns:ma="http://schemas.microsoft.com/office/2006/metadata/properties/metaAttributes" ct:_="" ma:_="" ma:contentTypeName="Document" ma:contentTypeID="0x01010081A80706761E274FBF7207A6EEFD509E" ma:contentTypeVersion="21" ma:contentTypeDescription="Een nieuw document maken." ma:contentTypeScope="" ma:versionID="c7f7fa388e5abb50cc001f149212818f">
   <xsd:schema xmlns:xsd="http://www.w3.org/2001/XMLSchema" xmlns:xs="http://www.w3.org/2001/XMLSchema" xmlns:p="http://schemas.microsoft.com/office/2006/metadata/properties" xmlns:ns2="8e39aab0-005d-45b6-a80e-05e5df2908d1" xmlns:ns3="cc018f0f-33de-4c4c-920d-26dc6e1acc33" targetNamespace="http://schemas.microsoft.com/office/2006/metadata/properties" ma:root="true" ma:fieldsID="08edb6dc26ea4fa726f6b1e3df08ac99" ns2:_="" ns3:_="">
     <xsd:import namespace="8e39aab0-005d-45b6-a80e-05e5df2908d1"/>
@@ -16302,43 +15900,10 @@
 </ct:contentTypeSchema>
 </file>
 
-<file path=customXml/item2.xml><?xml version="1.0" encoding="utf-8"?>
-<p:properties xmlns:p="http://schemas.microsoft.com/office/2006/metadata/properties" xmlns:xsi="http://www.w3.org/2001/XMLSchema-instance" xmlns:pc="http://schemas.microsoft.com/office/infopath/2007/PartnerControls">
-  <documentManagement>
-    <test xmlns="8e39aab0-005d-45b6-a80e-05e5df2908d1" xsi:nil="true"/>
-    <TaxCatchAll xmlns="cc018f0f-33de-4c4c-920d-26dc6e1acc33" xsi:nil="true"/>
-    <lcf76f155ced4ddcb4097134ff3c332f xmlns="8e39aab0-005d-45b6-a80e-05e5df2908d1">
-      <Terms xmlns="http://schemas.microsoft.com/office/infopath/2007/PartnerControls"/>
-    </lcf76f155ced4ddcb4097134ff3c332f>
-    <Description xmlns="8e39aab0-005d-45b6-a80e-05e5df2908d1" xsi:nil="true"/>
-  </documentManagement>
-</p:properties>
-</file>
-
-<file path=customXml/item3.xml><?xml version="1.0" encoding="utf-8"?>
-<?mso-contentType ?>
-<FormTemplates xmlns="http://schemas.microsoft.com/sharepoint/v3/contenttype/forms">
-  <Display>DocumentLibraryForm</Display>
-  <Edit>DocumentLibraryForm</Edit>
-  <New>DocumentLibraryForm</New>
-</FormTemplates>
-</file>
-
 <file path=customXml/itemProps1.xml><?xml version="1.0" encoding="utf-8"?>
-<ds:datastoreItem xmlns:ds="http://schemas.openxmlformats.org/officeDocument/2006/customXml" ds:itemID="{121FD689-9C32-4222-BC76-FF86F32E80AD}">
+<ds:datastoreItem xmlns:ds="http://schemas.openxmlformats.org/officeDocument/2006/customXml" ds:itemID="{2EA12E90-AB8E-4722-847F-197088183E8B}">
   <ds:schemaRefs>
-    <ds:schemaRef ds:uri="http://schemas.microsoft.com/office/2006/metadata/contentType"/>
-    <ds:schemaRef ds:uri="http://schemas.microsoft.com/office/2006/metadata/properties/metaAttributes"/>
-    <ds:schemaRef ds:uri="http://www.w3.org/2001/XMLSchema"/>
-    <ds:schemaRef ds:uri="http://schemas.microsoft.com/office/2006/metadata/properties"/>
-    <ds:schemaRef ds:uri="8e39aab0-005d-45b6-a80e-05e5df2908d1"/>
-    <ds:schemaRef ds:uri="cc018f0f-33de-4c4c-920d-26dc6e1acc33"/>
-    <ds:schemaRef ds:uri="http://schemas.microsoft.com/office/2006/documentManagement/types"/>
-    <ds:schemaRef ds:uri="http://schemas.microsoft.com/office/infopath/2007/PartnerControls"/>
-    <ds:schemaRef ds:uri="http://schemas.openxmlformats.org/package/2006/metadata/core-properties"/>
-    <ds:schemaRef ds:uri="http://purl.org/dc/elements/1.1/"/>
-    <ds:schemaRef ds:uri="http://purl.org/dc/terms/"/>
-    <ds:schemaRef ds:uri="http://schemas.microsoft.com/internal/obd"/>
+    <ds:schemaRef ds:uri="http://schemas.microsoft.com/sharepoint/v3/contenttype/forms"/>
   </ds:schemaRefs>
 </ds:datastoreItem>
 </file>
@@ -16361,9 +15926,20 @@
 </file>
 
 <file path=customXml/itemProps3.xml><?xml version="1.0" encoding="utf-8"?>
-<ds:datastoreItem xmlns:ds="http://schemas.openxmlformats.org/officeDocument/2006/customXml" ds:itemID="{2EA12E90-AB8E-4722-847F-197088183E8B}">
+<ds:datastoreItem xmlns:ds="http://schemas.openxmlformats.org/officeDocument/2006/customXml" ds:itemID="{121FD689-9C32-4222-BC76-FF86F32E80AD}">
   <ds:schemaRefs>
-    <ds:schemaRef ds:uri="http://schemas.microsoft.com/sharepoint/v3/contenttype/forms"/>
+    <ds:schemaRef ds:uri="http://schemas.microsoft.com/office/2006/metadata/contentType"/>
+    <ds:schemaRef ds:uri="http://schemas.microsoft.com/office/2006/metadata/properties/metaAttributes"/>
+    <ds:schemaRef ds:uri="http://www.w3.org/2001/XMLSchema"/>
+    <ds:schemaRef ds:uri="http://schemas.microsoft.com/office/2006/metadata/properties"/>
+    <ds:schemaRef ds:uri="8e39aab0-005d-45b6-a80e-05e5df2908d1"/>
+    <ds:schemaRef ds:uri="cc018f0f-33de-4c4c-920d-26dc6e1acc33"/>
+    <ds:schemaRef ds:uri="http://schemas.microsoft.com/office/2006/documentManagement/types"/>
+    <ds:schemaRef ds:uri="http://schemas.microsoft.com/office/infopath/2007/PartnerControls"/>
+    <ds:schemaRef ds:uri="http://schemas.openxmlformats.org/package/2006/metadata/core-properties"/>
+    <ds:schemaRef ds:uri="http://purl.org/dc/elements/1.1/"/>
+    <ds:schemaRef ds:uri="http://purl.org/dc/terms/"/>
+    <ds:schemaRef ds:uri="http://schemas.microsoft.com/internal/obd"/>
   </ds:schemaRefs>
 </ds:datastoreItem>
 </file>